--- a/cloud_bioinfo_platform.pptx
+++ b/cloud_bioinfo_platform.pptx
@@ -3090,6 +3090,14 @@
 <file path=ppt/slides/slide1.xml><?xml version="1.0" encoding="utf-8"?>
 <p:sld xmlns:a="http://schemas.openxmlformats.org/drawingml/2006/main" xmlns:p="http://schemas.openxmlformats.org/presentationml/2006/main" xmlns:r="http://schemas.openxmlformats.org/officeDocument/2006/relationships">
   <p:cSld>
+    <p:bg>
+      <p:bgPr>
+        <a:solidFill>
+          <a:srgbClr val="ADD8E6"/>
+        </a:solidFill>
+        <a:effectLst/>
+      </p:bgPr>
+    </p:bg>
     <p:spTree>
       <p:nvGrpSpPr>
         <p:cNvPr id="1" name=""/>
@@ -3210,6 +3218,14 @@
 <file path=ppt/slides/slide2.xml><?xml version="1.0" encoding="utf-8"?>
 <p:sld xmlns:a="http://schemas.openxmlformats.org/drawingml/2006/main" xmlns:p="http://schemas.openxmlformats.org/presentationml/2006/main" xmlns:r="http://schemas.openxmlformats.org/officeDocument/2006/relationships">
   <p:cSld>
+    <p:bg>
+      <p:bgPr>
+        <a:solidFill>
+          <a:srgbClr val="ADD8E6"/>
+        </a:solidFill>
+        <a:effectLst/>
+      </p:bgPr>
+    </p:bg>
     <p:spTree>
       <p:nvGrpSpPr>
         <p:cNvPr id="1" name=""/>
